--- a/Endogeneity.pptx
+++ b/Endogeneity.pptx
@@ -159,7 +159,7 @@
   <pc:docChgLst>
     <pc:chgData name="Daryanto, Ahmad" userId="61940c2a-8427-4576-9f17-0c8fab086415" providerId="ADAL" clId="{7843BEE4-BB9E-47EA-A812-8FBB036213D7}"/>
     <pc:docChg chg="undo custSel addSld delSld modSld sldOrd">
-      <pc:chgData name="Daryanto, Ahmad" userId="61940c2a-8427-4576-9f17-0c8fab086415" providerId="ADAL" clId="{7843BEE4-BB9E-47EA-A812-8FBB036213D7}" dt="2026-09-08T08:09:28.654" v="784" actId="255"/>
+      <pc:chgData name="Daryanto, Ahmad" userId="61940c2a-8427-4576-9f17-0c8fab086415" providerId="ADAL" clId="{7843BEE4-BB9E-47EA-A812-8FBB036213D7}" dt="2026-09-09T02:44:28.434" v="787" actId="1076"/>
       <pc:docMkLst>
         <pc:docMk/>
       </pc:docMkLst>
@@ -192,14 +192,6 @@
           <pc:docMk/>
           <pc:sldMk cId="2087706263" sldId="275"/>
         </pc:sldMkLst>
-        <pc:spChg chg="add del">
-          <ac:chgData name="Daryanto, Ahmad" userId="61940c2a-8427-4576-9f17-0c8fab086415" providerId="ADAL" clId="{7843BEE4-BB9E-47EA-A812-8FBB036213D7}" dt="2026-09-07T02:45:28.831" v="13" actId="478"/>
-          <ac:spMkLst>
-            <pc:docMk/>
-            <pc:sldMk cId="2087706263" sldId="275"/>
-            <ac:spMk id="3" creationId="{1A41D51D-6D0D-985F-2472-268B9A056F44}"/>
-          </ac:spMkLst>
-        </pc:spChg>
         <pc:spChg chg="mod">
           <ac:chgData name="Daryanto, Ahmad" userId="61940c2a-8427-4576-9f17-0c8fab086415" providerId="ADAL" clId="{7843BEE4-BB9E-47EA-A812-8FBB036213D7}" dt="2026-09-03T01:38:06.338" v="1" actId="20577"/>
           <ac:spMkLst>
@@ -269,12 +261,28 @@
           </ac:picMkLst>
         </pc:picChg>
       </pc:sldChg>
-      <pc:sldChg chg="add">
-        <pc:chgData name="Daryanto, Ahmad" userId="61940c2a-8427-4576-9f17-0c8fab086415" providerId="ADAL" clId="{7843BEE4-BB9E-47EA-A812-8FBB036213D7}" dt="2026-09-07T02:45:22.299" v="12"/>
+      <pc:sldChg chg="addSp delSp modSp add mod">
+        <pc:chgData name="Daryanto, Ahmad" userId="61940c2a-8427-4576-9f17-0c8fab086415" providerId="ADAL" clId="{7843BEE4-BB9E-47EA-A812-8FBB036213D7}" dt="2026-09-09T02:44:28.434" v="787" actId="1076"/>
         <pc:sldMkLst>
           <pc:docMk/>
           <pc:sldMk cId="2718271772" sldId="465"/>
         </pc:sldMkLst>
+        <pc:spChg chg="del">
+          <ac:chgData name="Daryanto, Ahmad" userId="61940c2a-8427-4576-9f17-0c8fab086415" providerId="ADAL" clId="{7843BEE4-BB9E-47EA-A812-8FBB036213D7}" dt="2026-09-09T02:44:23.599" v="785" actId="478"/>
+          <ac:spMkLst>
+            <pc:docMk/>
+            <pc:sldMk cId="2718271772" sldId="465"/>
+            <ac:spMk id="5" creationId="{DBB4753E-11EA-790E-1D88-F2F8B69007AE}"/>
+          </ac:spMkLst>
+        </pc:spChg>
+        <pc:spChg chg="add mod">
+          <ac:chgData name="Daryanto, Ahmad" userId="61940c2a-8427-4576-9f17-0c8fab086415" providerId="ADAL" clId="{7843BEE4-BB9E-47EA-A812-8FBB036213D7}" dt="2026-09-09T02:44:28.434" v="787" actId="1076"/>
+          <ac:spMkLst>
+            <pc:docMk/>
+            <pc:sldMk cId="2718271772" sldId="465"/>
+            <ac:spMk id="6" creationId="{7DEEBAE4-B367-459A-940D-72C026858FC2}"/>
+          </ac:spMkLst>
+        </pc:spChg>
       </pc:sldChg>
       <pc:sldChg chg="addSp modSp new mod modClrScheme chgLayout">
         <pc:chgData name="Daryanto, Ahmad" userId="61940c2a-8427-4576-9f17-0c8fab086415" providerId="ADAL" clId="{7843BEE4-BB9E-47EA-A812-8FBB036213D7}" dt="2026-09-07T02:52:00.858" v="158" actId="20577"/>
@@ -618,7 +626,7 @@
           <a:p>
             <a:fld id="{3EFD76AC-45F9-4892-B535-0E70D2D91ABD}" type="datetimeFigureOut">
               <a:rPr lang="en-GB" smtClean="0"/>
-              <a:t>08/09/2026</a:t>
+              <a:t>09/09/2026</a:t>
             </a:fld>
             <a:endParaRPr lang="en-GB"/>
           </a:p>
@@ -1539,7 +1547,7 @@
           <a:p>
             <a:fld id="{F5DCFBB3-2397-5441-8DD5-BDF2C45F759B}" type="datetimeFigureOut">
               <a:rPr lang="en-US" smtClean="0"/>
-              <a:t>9/8/2026</a:t>
+              <a:t>9/9/2026</a:t>
             </a:fld>
             <a:endParaRPr lang="en-US"/>
           </a:p>
@@ -1739,7 +1747,7 @@
           <a:p>
             <a:fld id="{F5DCFBB3-2397-5441-8DD5-BDF2C45F759B}" type="datetimeFigureOut">
               <a:rPr lang="en-US" smtClean="0"/>
-              <a:t>9/8/2026</a:t>
+              <a:t>9/9/2026</a:t>
             </a:fld>
             <a:endParaRPr lang="en-US"/>
           </a:p>
@@ -1949,7 +1957,7 @@
           <a:p>
             <a:fld id="{F5DCFBB3-2397-5441-8DD5-BDF2C45F759B}" type="datetimeFigureOut">
               <a:rPr lang="en-US" smtClean="0"/>
-              <a:t>9/8/2026</a:t>
+              <a:t>9/9/2026</a:t>
             </a:fld>
             <a:endParaRPr lang="en-US"/>
           </a:p>
@@ -2184,7 +2192,7 @@
           <a:p>
             <a:fld id="{F5DCFBB3-2397-5441-8DD5-BDF2C45F759B}" type="datetimeFigureOut">
               <a:rPr lang="en-US" smtClean="0"/>
-              <a:t>9/8/2026</a:t>
+              <a:t>9/9/2026</a:t>
             </a:fld>
             <a:endParaRPr lang="en-US"/>
           </a:p>
@@ -2460,7 +2468,7 @@
           <a:p>
             <a:fld id="{F5DCFBB3-2397-5441-8DD5-BDF2C45F759B}" type="datetimeFigureOut">
               <a:rPr lang="en-US" smtClean="0"/>
-              <a:t>9/8/2026</a:t>
+              <a:t>9/9/2026</a:t>
             </a:fld>
             <a:endParaRPr lang="en-US"/>
           </a:p>
@@ -2728,7 +2736,7 @@
           <a:p>
             <a:fld id="{F5DCFBB3-2397-5441-8DD5-BDF2C45F759B}" type="datetimeFigureOut">
               <a:rPr lang="en-US" smtClean="0"/>
-              <a:t>9/8/2026</a:t>
+              <a:t>9/9/2026</a:t>
             </a:fld>
             <a:endParaRPr lang="en-US"/>
           </a:p>
@@ -3143,7 +3151,7 @@
           <a:p>
             <a:fld id="{F5DCFBB3-2397-5441-8DD5-BDF2C45F759B}" type="datetimeFigureOut">
               <a:rPr lang="en-US" smtClean="0"/>
-              <a:t>9/8/2026</a:t>
+              <a:t>9/9/2026</a:t>
             </a:fld>
             <a:endParaRPr lang="en-US"/>
           </a:p>
@@ -3285,7 +3293,7 @@
           <a:p>
             <a:fld id="{F5DCFBB3-2397-5441-8DD5-BDF2C45F759B}" type="datetimeFigureOut">
               <a:rPr lang="en-US" smtClean="0"/>
-              <a:t>9/8/2026</a:t>
+              <a:t>9/9/2026</a:t>
             </a:fld>
             <a:endParaRPr lang="en-US"/>
           </a:p>
@@ -3398,7 +3406,7 @@
           <a:p>
             <a:fld id="{F5DCFBB3-2397-5441-8DD5-BDF2C45F759B}" type="datetimeFigureOut">
               <a:rPr lang="en-US" smtClean="0"/>
-              <a:t>9/8/2026</a:t>
+              <a:t>9/9/2026</a:t>
             </a:fld>
             <a:endParaRPr lang="en-US"/>
           </a:p>
@@ -3711,7 +3719,7 @@
           <a:p>
             <a:fld id="{F5DCFBB3-2397-5441-8DD5-BDF2C45F759B}" type="datetimeFigureOut">
               <a:rPr lang="en-US" smtClean="0"/>
-              <a:t>9/8/2026</a:t>
+              <a:t>9/9/2026</a:t>
             </a:fld>
             <a:endParaRPr lang="en-US"/>
           </a:p>
@@ -4000,7 +4008,7 @@
           <a:p>
             <a:fld id="{F5DCFBB3-2397-5441-8DD5-BDF2C45F759B}" type="datetimeFigureOut">
               <a:rPr lang="en-US" smtClean="0"/>
-              <a:t>9/8/2026</a:t>
+              <a:t>9/9/2026</a:t>
             </a:fld>
             <a:endParaRPr lang="en-US"/>
           </a:p>
@@ -4243,7 +4251,7 @@
           <a:p>
             <a:fld id="{F5DCFBB3-2397-5441-8DD5-BDF2C45F759B}" type="datetimeFigureOut">
               <a:rPr lang="en-US" smtClean="0"/>
-              <a:t>9/8/2026</a:t>
+              <a:t>9/9/2026</a:t>
             </a:fld>
             <a:endParaRPr lang="en-US"/>
           </a:p>
@@ -5709,8 +5717,8 @@
           </a:p>
         </p:txBody>
       </p:sp>
-      <mc:AlternateContent xmlns:mc="http://schemas.openxmlformats.org/markup-compatibility/2006">
-        <mc:Choice xmlns:a14="http://schemas.microsoft.com/office/drawing/2010/main" Requires="a14">
+      <mc:AlternateContent xmlns:mc="http://schemas.openxmlformats.org/markup-compatibility/2006" xmlns:a14="http://schemas.microsoft.com/office/drawing/2010/main">
+        <mc:Choice Requires="a14">
           <p:sp>
             <p:nvSpPr>
               <p:cNvPr id="3" name="Content Placeholder 2">
@@ -6042,7 +6050,7 @@
             </p:txBody>
           </p:sp>
         </mc:Choice>
-        <mc:Fallback>
+        <mc:Fallback xmlns="">
           <p:sp>
             <p:nvSpPr>
               <p:cNvPr id="3" name="Content Placeholder 2">
@@ -11186,10 +11194,10 @@
       </p:sp>
       <p:sp>
         <p:nvSpPr>
-          <p:cNvPr id="5" name="TextBox 4">
-            <a:extLst>
-              <a:ext uri="{FF2B5EF4-FFF2-40B4-BE49-F238E27FC236}">
-                <a16:creationId xmlns:a16="http://schemas.microsoft.com/office/drawing/2014/main" id="{DBB4753E-11EA-790E-1D88-F2F8B69007AE}"/>
+          <p:cNvPr id="6" name="TextBox 5">
+            <a:extLst>
+              <a:ext uri="{FF2B5EF4-FFF2-40B4-BE49-F238E27FC236}">
+                <a16:creationId xmlns:a16="http://schemas.microsoft.com/office/drawing/2014/main" id="{7DEEBAE4-B367-459A-940D-72C026858FC2}"/>
               </a:ext>
             </a:extLst>
           </p:cNvPr>
@@ -11198,8 +11206,8 @@
         </p:nvSpPr>
         <p:spPr>
           <a:xfrm>
-            <a:off x="2122715" y="1825625"/>
-            <a:ext cx="6096000" cy="954107"/>
+            <a:off x="2449285" y="1992477"/>
+            <a:ext cx="6096000" cy="369332"/>
           </a:xfrm>
           <a:prstGeom prst="rect">
             <a:avLst/>
@@ -11213,15 +11221,12 @@
           <a:lstStyle/>
           <a:p>
             <a:r>
-              <a:rPr lang="en-GB" sz="2800" dirty="0">
+              <a:rPr lang="en-GB" dirty="0">
                 <a:hlinkClick r:id="rId2"/>
               </a:rPr>
-              <a:t>https://github.com/ahdar1/FIA</a:t>
-            </a:r>
-            <a:endParaRPr lang="en-GB" sz="2800" dirty="0"/>
-          </a:p>
-          <a:p>
-            <a:endParaRPr lang="en-GB" sz="2800" dirty="0"/>
+              <a:t>FIA Workshop Resources</a:t>
+            </a:r>
+            <a:endParaRPr lang="en-GB" dirty="0"/>
           </a:p>
         </p:txBody>
       </p:sp>
